--- a/03-report/presentation/graduation-presentation.pptx
+++ b/03-report/presentation/graduation-presentation.pptx
@@ -8917,7 +8917,7 @@
                 <a:ea typeface="Arial" pitchFamily="34" charset="-122"/>
                 <a:cs typeface="Arial" pitchFamily="34" charset="-120"/>
               </a:rPr>
-              <a:t>총 테스트: 707개</a:t>
+              <a:t>총 테스트: 757개</a:t>
             </a:r>
             <a:endParaRPr lang="en-US" sz="1300" dirty="0"/>
           </a:p>
@@ -9054,7 +9054,7 @@
                 <a:ea typeface="Arial" pitchFamily="34" charset="-122"/>
                 <a:cs typeface="Arial" pitchFamily="34" charset="-120"/>
               </a:rPr>
-              <a:t>Statements: 96.27%</a:t>
+              <a:t>Statements: 98.37%</a:t>
             </a:r>
             <a:endParaRPr lang="en-US" sz="1200" dirty="0"/>
           </a:p>
@@ -11886,7 +11886,7 @@
                 <a:ea typeface="Arial" pitchFamily="34" charset="-122"/>
                 <a:cs typeface="Arial" pitchFamily="34" charset="-120"/>
               </a:rPr>
-              <a:t>초기 상태</a:t>
+              <a:t>Enterprise</a:t>
             </a:r>
             <a:endParaRPr lang="en-US" sz="1200" dirty="0"/>
           </a:p>
@@ -11925,7 +11925,7 @@
                 <a:ea typeface="Arial" pitchFamily="34" charset="-122"/>
                 <a:cs typeface="Arial" pitchFamily="34" charset="-120"/>
               </a:rPr>
-              <a:t>1.0 (완벽)</a:t>
+              <a:t>0.94</a:t>
             </a:r>
             <a:endParaRPr lang="en-US" sz="1200" dirty="0"/>
           </a:p>
@@ -12004,7 +12004,7 @@
                 <a:ea typeface="Arial" pitchFamily="34" charset="-122"/>
                 <a:cs typeface="Arial" pitchFamily="34" charset="-120"/>
               </a:rPr>
-              <a:t>일반 부하</a:t>
+              <a:t>Premium</a:t>
             </a:r>
             <a:endParaRPr lang="en-US" sz="1200" dirty="0"/>
           </a:p>
@@ -12043,7 +12043,7 @@
                 <a:ea typeface="Arial" pitchFamily="34" charset="-122"/>
                 <a:cs typeface="Arial" pitchFamily="34" charset="-120"/>
               </a:rPr>
-              <a:t>0.98</a:t>
+              <a:t>0.94</a:t>
             </a:r>
             <a:endParaRPr lang="en-US" sz="1200" dirty="0"/>
           </a:p>
@@ -12122,7 +12122,7 @@
                 <a:ea typeface="Arial" pitchFamily="34" charset="-122"/>
                 <a:cs typeface="Arial" pitchFamily="34" charset="-120"/>
               </a:rPr>
-              <a:t>고부하 상태</a:t>
+              <a:t>Standard</a:t>
             </a:r>
             <a:endParaRPr lang="en-US" sz="1200" dirty="0"/>
           </a:p>
@@ -12161,7 +12161,7 @@
                 <a:ea typeface="Arial" pitchFamily="34" charset="-122"/>
                 <a:cs typeface="Arial" pitchFamily="34" charset="-120"/>
               </a:rPr>
-              <a:t>0.95</a:t>
+              <a:t>0.94</a:t>
             </a:r>
             <a:endParaRPr lang="en-US" sz="1200" dirty="0"/>
           </a:p>
@@ -12240,7 +12240,7 @@
                 <a:ea typeface="Arial" pitchFamily="34" charset="-122"/>
                 <a:cs typeface="Arial" pitchFamily="34" charset="-120"/>
               </a:rPr>
-              <a:t>편향 시나리오</a:t>
+              <a:t>Free</a:t>
             </a:r>
             <a:endParaRPr lang="en-US" sz="1200" dirty="0"/>
           </a:p>
@@ -12338,7 +12338,7 @@
                 <a:ea typeface="Arial" pitchFamily="34" charset="-122"/>
                 <a:cs typeface="Arial" pitchFamily="34" charset="-120"/>
               </a:rPr>
-              <a:t>결론: WFQ는 다양한 조건에서 0.95 이상의 공정성 유지</a:t>
+              <a:t>전체 시스템: 0.89 (티어별 가중치 차이로 인한 의도된 불균형)</a:t>
             </a:r>
             <a:endParaRPr lang="en-US" sz="1400" dirty="0"/>
           </a:p>
@@ -14136,7 +14136,7 @@
                 <a:ea typeface="Arial" pitchFamily="34" charset="-122"/>
                 <a:cs typeface="Arial" pitchFamily="34" charset="-120"/>
               </a:rPr>
-              <a:t>✓ 707개 테스트 100% 통과, 96.27% 커버리지</a:t>
+              <a:t>✓ 757개 테스트 100% 통과, 98.37% 커버리지</a:t>
             </a:r>
             <a:endParaRPr lang="en-US" sz="1300" dirty="0"/>
           </a:p>
@@ -19984,7 +19984,7 @@
                 <a:ea typeface="Arial" pitchFamily="34" charset="-122"/>
                 <a:cs typeface="Arial" pitchFamily="34" charset="-120"/>
               </a:rPr>
-              <a:t>본 시스템: 0.95 이상 유지</a:t>
+              <a:t>개별 테넌트: 0.92-0.98</a:t>
             </a:r>
             <a:endParaRPr lang="en-US" sz="1200" dirty="0"/>
           </a:p>
@@ -20007,7 +20007,7 @@
                 <a:ea typeface="Arial" pitchFamily="34" charset="-122"/>
                 <a:cs typeface="Arial" pitchFamily="34" charset="-120"/>
               </a:rPr>
-              <a:t>다양한 조건에서 높은</a:t>
+              <a:t>전체 시스템: 0.89</a:t>
             </a:r>
             <a:endParaRPr lang="en-US" sz="1200" dirty="0"/>
           </a:p>
@@ -20024,7 +20024,7 @@
                 <a:ea typeface="Arial" pitchFamily="34" charset="-122"/>
                 <a:cs typeface="Arial" pitchFamily="34" charset="-120"/>
               </a:rPr>
-              <a:t>공정성 보장</a:t>
+              <a:t>멀티테넌트 공정성 우수</a:t>
             </a:r>
             <a:endParaRPr lang="en-US" sz="1200" dirty="0"/>
           </a:p>
